--- a/docs/presentaties/ClubComm-bestuur.pptx
+++ b/docs/presentaties/ClubComm-bestuur.pptx
@@ -1873,7 +1873,7 @@
             </a:avLst>
           </a:prstGeom>
           <a:solidFill>
-            <a:srgbClr val="0B2545"/>
+            <a:srgbClr val="2A4A7A"/>
           </a:solidFill>
           <a:ln/>
           <a:effectLst>
